--- a/Store Support/Projects/VET_Dashboard/reports/VET_Executive_Report_WK10.pptx
+++ b/Store Support/Projects/VET_Dashboard/reports/VET_Executive_Report_WK10.pptx
@@ -3251,7 +3251,7 @@
         <p:spPr>
           <a:xfrm>
             <a:off x="0" y="0"/>
-            <a:ext cx="8778240" cy="2800277"/>
+            <a:ext cx="8778240" cy="3154388"/>
           </a:xfrm>
           <a:prstGeom prst="rect">
             <a:avLst/>
@@ -3335,7 +3335,7 @@
         <p:spPr>
           <a:xfrm>
             <a:off x="0" y="0"/>
-            <a:ext cx="8778240" cy="4491625"/>
+            <a:ext cx="8778240" cy="4938924"/>
           </a:xfrm>
           <a:prstGeom prst="rect">
             <a:avLst/>
@@ -3461,7 +3461,7 @@
         <p:spPr>
           <a:xfrm>
             <a:off x="0" y="0"/>
-            <a:ext cx="8778240" cy="6299458"/>
+            <a:ext cx="8778240" cy="5908072"/>
           </a:xfrm>
           <a:prstGeom prst="rect">
             <a:avLst/>
@@ -3503,7 +3503,7 @@
         <p:spPr>
           <a:xfrm>
             <a:off x="0" y="0"/>
-            <a:ext cx="8778240" cy="6583680"/>
+            <a:ext cx="8778240" cy="6206271"/>
           </a:xfrm>
           <a:prstGeom prst="rect">
             <a:avLst/>
@@ -3545,7 +3545,7 @@
         <p:spPr>
           <a:xfrm>
             <a:off x="0" y="0"/>
-            <a:ext cx="8778240" cy="6583680"/>
+            <a:ext cx="8778240" cy="5814885"/>
           </a:xfrm>
           <a:prstGeom prst="rect">
             <a:avLst/>
@@ -3587,7 +3587,7 @@
         <p:spPr>
           <a:xfrm>
             <a:off x="0" y="0"/>
-            <a:ext cx="8778240" cy="4146833"/>
+            <a:ext cx="8778240" cy="3527137"/>
           </a:xfrm>
           <a:prstGeom prst="rect">
             <a:avLst/>
